--- a/GSTACK_TEAM_MODE_TUTORIAL_DECK.pptx
+++ b/GSTACK_TEAM_MODE_TUTORIAL_DECK.pptx
@@ -15,9 +15,11 @@
     <p:sldId id="263" r:id="rId9"/>
     <p:sldId id="264" r:id="rId10"/>
     <p:sldId id="265" r:id="rId11"/>
+    <p:sldId id="266" r:id="rId12"/>
+    <p:sldId id="267" r:id="rId13"/>
   </p:sldIdLst>
   <p:notesMasterIdLst>
-    <p:notesMasterId r:id="rId12"/>
+    <p:notesMasterId r:id="rId14"/>
   </p:notesMasterIdLst>
   <p:sldSz cx="12192000" cy="6858000"/>
   <p:notesSz cx="6858000" cy="12192000"/>
@@ -623,6 +625,182 @@
             <a:fld id="{F7021451-1387-4CA6-816F-3879F97B5CBC}" type="slidenum">
               <a:rPr lang="en-US"/>
               <a:t>10</a:t>
+            </a:fld>
+            <a:endParaRPr lang="en-US"/>
+          </a:p>
+        </p:txBody>
+      </p:sp>
+    </p:spTree>
+    <p:extLst>
+      <p:ext uri="{BB962C8B-B14F-4D97-AF65-F5344CB8AC3E}">
+        <p14:creationId xmlns:p14="http://schemas.microsoft.com/office/powerpoint/2010/main" val="1024086991"/>
+      </p:ext>
+    </p:extLst>
+  </p:cSld>
+  <p:clrMapOvr>
+    <a:masterClrMapping/>
+  </p:clrMapOvr>
+</p:notes>
+</file>
+
+<file path=ppt/notesSlides/notesSlide11.xml><?xml version="1.0" encoding="utf-8"?>
+<p:notes xmlns:a="http://schemas.openxmlformats.org/drawingml/2006/main" xmlns:r="http://schemas.openxmlformats.org/officeDocument/2006/relationships" xmlns:p="http://schemas.openxmlformats.org/presentationml/2006/main">
+  <p:cSld>
+    <p:spTree>
+      <p:nvGrpSpPr>
+        <p:cNvPr id="1" name=""/>
+        <p:cNvGrpSpPr/>
+        <p:nvPr/>
+      </p:nvGrpSpPr>
+      <p:grpSpPr>
+        <a:xfrm>
+          <a:off x="0" y="0"/>
+          <a:ext cx="0" cy="0"/>
+          <a:chOff x="0" y="0"/>
+          <a:chExt cx="0" cy="0"/>
+        </a:xfrm>
+      </p:grpSpPr>
+      <p:sp>
+        <p:nvSpPr>
+          <p:cNvPr id="2" name="Slide Image Placeholder 1"/>
+          <p:cNvSpPr>
+            <a:spLocks noGrp="1" noRot="1" noChangeAspect="1"/>
+          </p:cNvSpPr>
+          <p:nvPr>
+            <p:ph type="sldImg"/>
+          </p:nvPr>
+        </p:nvSpPr>
+        <p:spPr/>
+      </p:sp>
+      <p:sp>
+        <p:nvSpPr>
+          <p:cNvPr id="3" name="Notes Placeholder 2"/>
+          <p:cNvSpPr>
+            <a:spLocks noGrp="1"/>
+          </p:cNvSpPr>
+          <p:nvPr>
+            <p:ph type="body" idx="1"/>
+          </p:nvPr>
+        </p:nvSpPr>
+        <p:spPr/>
+        <p:txBody>
+          <a:bodyPr/>
+          <a:lstStyle/>
+          <a:p>
+            <a:r>
+              <a:rPr lang="en-US" dirty="0"/>
+              <a:t/>
+            </a:r>
+            <a:endParaRPr lang="en-US" dirty="0"/>
+          </a:p>
+        </p:txBody>
+      </p:sp>
+      <p:sp>
+        <p:nvSpPr>
+          <p:cNvPr id="4" name="Slide Number Placeholder 3"/>
+          <p:cNvSpPr>
+            <a:spLocks noGrp="1"/>
+          </p:cNvSpPr>
+          <p:nvPr>
+            <p:ph type="sldNum" sz="quarter" idx="10"/>
+          </p:nvPr>
+        </p:nvSpPr>
+        <p:spPr/>
+        <p:txBody>
+          <a:bodyPr/>
+          <a:lstStyle/>
+          <a:p>
+            <a:fld id="{F7021451-1387-4CA6-816F-3879F97B5CBC}" type="slidenum">
+              <a:rPr lang="en-US"/>
+              <a:t>11</a:t>
+            </a:fld>
+            <a:endParaRPr lang="en-US"/>
+          </a:p>
+        </p:txBody>
+      </p:sp>
+    </p:spTree>
+    <p:extLst>
+      <p:ext uri="{BB962C8B-B14F-4D97-AF65-F5344CB8AC3E}">
+        <p14:creationId xmlns:p14="http://schemas.microsoft.com/office/powerpoint/2010/main" val="1024086991"/>
+      </p:ext>
+    </p:extLst>
+  </p:cSld>
+  <p:clrMapOvr>
+    <a:masterClrMapping/>
+  </p:clrMapOvr>
+</p:notes>
+</file>
+
+<file path=ppt/notesSlides/notesSlide12.xml><?xml version="1.0" encoding="utf-8"?>
+<p:notes xmlns:a="http://schemas.openxmlformats.org/drawingml/2006/main" xmlns:r="http://schemas.openxmlformats.org/officeDocument/2006/relationships" xmlns:p="http://schemas.openxmlformats.org/presentationml/2006/main">
+  <p:cSld>
+    <p:spTree>
+      <p:nvGrpSpPr>
+        <p:cNvPr id="1" name=""/>
+        <p:cNvGrpSpPr/>
+        <p:nvPr/>
+      </p:nvGrpSpPr>
+      <p:grpSpPr>
+        <a:xfrm>
+          <a:off x="0" y="0"/>
+          <a:ext cx="0" cy="0"/>
+          <a:chOff x="0" y="0"/>
+          <a:chExt cx="0" cy="0"/>
+        </a:xfrm>
+      </p:grpSpPr>
+      <p:sp>
+        <p:nvSpPr>
+          <p:cNvPr id="2" name="Slide Image Placeholder 1"/>
+          <p:cNvSpPr>
+            <a:spLocks noGrp="1" noRot="1" noChangeAspect="1"/>
+          </p:cNvSpPr>
+          <p:nvPr>
+            <p:ph type="sldImg"/>
+          </p:nvPr>
+        </p:nvSpPr>
+        <p:spPr/>
+      </p:sp>
+      <p:sp>
+        <p:nvSpPr>
+          <p:cNvPr id="3" name="Notes Placeholder 2"/>
+          <p:cNvSpPr>
+            <a:spLocks noGrp="1"/>
+          </p:cNvSpPr>
+          <p:nvPr>
+            <p:ph type="body" idx="1"/>
+          </p:nvPr>
+        </p:nvSpPr>
+        <p:spPr/>
+        <p:txBody>
+          <a:bodyPr/>
+          <a:lstStyle/>
+          <a:p>
+            <a:r>
+              <a:rPr lang="en-US" dirty="0"/>
+              <a:t/>
+            </a:r>
+            <a:endParaRPr lang="en-US" dirty="0"/>
+          </a:p>
+        </p:txBody>
+      </p:sp>
+      <p:sp>
+        <p:nvSpPr>
+          <p:cNvPr id="4" name="Slide Number Placeholder 3"/>
+          <p:cNvSpPr>
+            <a:spLocks noGrp="1"/>
+          </p:cNvSpPr>
+          <p:nvPr>
+            <p:ph type="sldNum" sz="quarter" idx="10"/>
+          </p:nvPr>
+        </p:nvSpPr>
+        <p:spPr/>
+        <p:txBody>
+          <a:bodyPr/>
+          <a:lstStyle/>
+          <a:p>
+            <a:fld id="{F7021451-1387-4CA6-816F-3879F97B5CBC}" type="slidenum">
+              <a:rPr lang="en-US"/>
+              <a:t>12</a:t>
             </a:fld>
             <a:endParaRPr lang="en-US"/>
           </a:p>
@@ -2052,6 +2230,1435 @@
     <p:bg>
       <p:bgPr>
         <a:solidFill>
+          <a:srgbClr val="FFFFFF"/>
+        </a:solidFill>
+      </p:bgPr>
+    </p:bg>
+    <p:spTree>
+      <p:nvGrpSpPr>
+        <p:cNvPr id="1" name=""/>
+        <p:cNvGrpSpPr/>
+        <p:nvPr/>
+      </p:nvGrpSpPr>
+      <p:grpSpPr>
+        <a:xfrm>
+          <a:off x="0" y="0"/>
+          <a:ext cx="0" cy="0"/>
+          <a:chOff x="0" y="0"/>
+          <a:chExt cx="0" cy="0"/>
+        </a:xfrm>
+      </p:grpSpPr>
+      <p:sp>
+        <p:nvSpPr>
+          <p:cNvPr id="2" name="Text 0"/>
+          <p:cNvSpPr/>
+          <p:nvPr/>
+        </p:nvSpPr>
+        <p:spPr>
+          <a:xfrm>
+            <a:off x="548640" y="457200"/>
+            <a:ext cx="11064240" cy="822960"/>
+          </a:xfrm>
+          <a:prstGeom prst="rect">
+            <a:avLst/>
+          </a:prstGeom>
+          <a:noFill/>
+          <a:ln/>
+        </p:spPr>
+        <p:txBody>
+          <a:bodyPr wrap="square" lIns="0" tIns="0" rIns="0" bIns="0" rtlCol="0" anchor="ctr"/>
+          <a:lstStyle/>
+          <a:p>
+            <a:pPr indent="0" marL="0">
+              <a:buNone/>
+            </a:pPr>
+            <a:r>
+              <a:rPr lang="en-US" sz="2600" b="1" dirty="0">
+                <a:solidFill>
+                  <a:srgbClr val="1F4E78"/>
+                </a:solidFill>
+                <a:latin typeface="Cambria" pitchFamily="34" charset="0"/>
+                <a:ea typeface="Cambria" pitchFamily="34" charset="-122"/>
+                <a:cs typeface="Cambria" pitchFamily="34" charset="-120"/>
+              </a:rPr>
+              <a:t>Fork the repo, then practice the workflow yourself</a:t>
+            </a:r>
+            <a:endParaRPr lang="en-US" sz="2600" dirty="0"/>
+          </a:p>
+        </p:txBody>
+      </p:sp>
+      <p:sp>
+        <p:nvSpPr>
+          <p:cNvPr id="3" name="Shape 1"/>
+          <p:cNvSpPr/>
+          <p:nvPr/>
+        </p:nvSpPr>
+        <p:spPr>
+          <a:xfrm>
+            <a:off x="548640" y="1600200"/>
+            <a:ext cx="457200" cy="457200"/>
+          </a:xfrm>
+          <a:prstGeom prst="ellipse">
+            <a:avLst/>
+          </a:prstGeom>
+          <a:solidFill>
+            <a:srgbClr val="1F4E78"/>
+          </a:solidFill>
+          <a:ln/>
+        </p:spPr>
+      </p:sp>
+      <p:sp>
+        <p:nvSpPr>
+          <p:cNvPr id="4" name="Text 2"/>
+          <p:cNvSpPr/>
+          <p:nvPr/>
+        </p:nvSpPr>
+        <p:spPr>
+          <a:xfrm>
+            <a:off x="548640" y="1600200"/>
+            <a:ext cx="457200" cy="457200"/>
+          </a:xfrm>
+          <a:prstGeom prst="rect">
+            <a:avLst/>
+          </a:prstGeom>
+          <a:noFill/>
+          <a:ln/>
+        </p:spPr>
+        <p:txBody>
+          <a:bodyPr wrap="square" lIns="0" tIns="0" rIns="0" bIns="0" rtlCol="0" anchor="ctr"/>
+          <a:lstStyle/>
+          <a:p>
+            <a:pPr algn="ctr" indent="0" marL="0">
+              <a:buNone/>
+            </a:pPr>
+            <a:r>
+              <a:rPr lang="en-US" sz="1600" b="1" dirty="0">
+                <a:solidFill>
+                  <a:srgbClr val="FFFFFF"/>
+                </a:solidFill>
+                <a:latin typeface="Calibri" pitchFamily="34" charset="0"/>
+                <a:ea typeface="Calibri" pitchFamily="34" charset="-122"/>
+                <a:cs typeface="Calibri" pitchFamily="34" charset="-120"/>
+              </a:rPr>
+              <a:t>1</a:t>
+            </a:r>
+            <a:endParaRPr lang="en-US" sz="1600" dirty="0"/>
+          </a:p>
+        </p:txBody>
+      </p:sp>
+      <p:sp>
+        <p:nvSpPr>
+          <p:cNvPr id="5" name="Text 3"/>
+          <p:cNvSpPr/>
+          <p:nvPr/>
+        </p:nvSpPr>
+        <p:spPr>
+          <a:xfrm>
+            <a:off x="1143000" y="1508760"/>
+            <a:ext cx="4709160" cy="777240"/>
+          </a:xfrm>
+          <a:prstGeom prst="rect">
+            <a:avLst/>
+          </a:prstGeom>
+          <a:noFill/>
+          <a:ln/>
+        </p:spPr>
+        <p:txBody>
+          <a:bodyPr wrap="square" lIns="0" tIns="0" rIns="0" bIns="0" rtlCol="0" anchor="ctr"/>
+          <a:lstStyle/>
+          <a:p>
+            <a:pPr indent="0" marL="0">
+              <a:buNone/>
+            </a:pPr>
+            <a:r>
+              <a:rPr lang="en-US" sz="1300" dirty="0">
+                <a:solidFill>
+                  <a:srgbClr val="1F1F1F"/>
+                </a:solidFill>
+                <a:latin typeface="Calibri" pitchFamily="34" charset="0"/>
+                <a:ea typeface="Calibri" pitchFamily="34" charset="-122"/>
+                <a:cs typeface="Calibri" pitchFamily="34" charset="-120"/>
+              </a:rPr>
+              <a:t>Get added as a collaborator (repo is private)</a:t>
+            </a:r>
+            <a:endParaRPr lang="en-US" sz="1300" dirty="0"/>
+          </a:p>
+        </p:txBody>
+      </p:sp>
+      <p:sp>
+        <p:nvSpPr>
+          <p:cNvPr id="6" name="Shape 4"/>
+          <p:cNvSpPr/>
+          <p:nvPr/>
+        </p:nvSpPr>
+        <p:spPr>
+          <a:xfrm>
+            <a:off x="548640" y="2468880"/>
+            <a:ext cx="457200" cy="457200"/>
+          </a:xfrm>
+          <a:prstGeom prst="ellipse">
+            <a:avLst/>
+          </a:prstGeom>
+          <a:solidFill>
+            <a:srgbClr val="1F4E78"/>
+          </a:solidFill>
+          <a:ln/>
+        </p:spPr>
+      </p:sp>
+      <p:sp>
+        <p:nvSpPr>
+          <p:cNvPr id="7" name="Text 5"/>
+          <p:cNvSpPr/>
+          <p:nvPr/>
+        </p:nvSpPr>
+        <p:spPr>
+          <a:xfrm>
+            <a:off x="548640" y="2468880"/>
+            <a:ext cx="457200" cy="457200"/>
+          </a:xfrm>
+          <a:prstGeom prst="rect">
+            <a:avLst/>
+          </a:prstGeom>
+          <a:noFill/>
+          <a:ln/>
+        </p:spPr>
+        <p:txBody>
+          <a:bodyPr wrap="square" lIns="0" tIns="0" rIns="0" bIns="0" rtlCol="0" anchor="ctr"/>
+          <a:lstStyle/>
+          <a:p>
+            <a:pPr algn="ctr" indent="0" marL="0">
+              <a:buNone/>
+            </a:pPr>
+            <a:r>
+              <a:rPr lang="en-US" sz="1600" b="1" dirty="0">
+                <a:solidFill>
+                  <a:srgbClr val="FFFFFF"/>
+                </a:solidFill>
+                <a:latin typeface="Calibri" pitchFamily="34" charset="0"/>
+                <a:ea typeface="Calibri" pitchFamily="34" charset="-122"/>
+                <a:cs typeface="Calibri" pitchFamily="34" charset="-120"/>
+              </a:rPr>
+              <a:t>2</a:t>
+            </a:r>
+            <a:endParaRPr lang="en-US" sz="1600" dirty="0"/>
+          </a:p>
+        </p:txBody>
+      </p:sp>
+      <p:sp>
+        <p:nvSpPr>
+          <p:cNvPr id="8" name="Text 6"/>
+          <p:cNvSpPr/>
+          <p:nvPr/>
+        </p:nvSpPr>
+        <p:spPr>
+          <a:xfrm>
+            <a:off x="1143000" y="2377440"/>
+            <a:ext cx="4709160" cy="777240"/>
+          </a:xfrm>
+          <a:prstGeom prst="rect">
+            <a:avLst/>
+          </a:prstGeom>
+          <a:noFill/>
+          <a:ln/>
+        </p:spPr>
+        <p:txBody>
+          <a:bodyPr wrap="square" lIns="0" tIns="0" rIns="0" bIns="0" rtlCol="0" anchor="ctr"/>
+          <a:lstStyle/>
+          <a:p>
+            <a:pPr indent="0" marL="0">
+              <a:buNone/>
+            </a:pPr>
+            <a:r>
+              <a:rPr lang="en-US" sz="1300" dirty="0">
+                <a:solidFill>
+                  <a:srgbClr val="1F1F1F"/>
+                </a:solidFill>
+                <a:latin typeface="Calibri" pitchFamily="34" charset="0"/>
+                <a:ea typeface="Calibri" pitchFamily="34" charset="-122"/>
+                <a:cs typeface="Calibri" pitchFamily="34" charset="-120"/>
+              </a:rPr>
+              <a:t>Fork github.com/mikelix/gstack-tutorial-1 to your own account</a:t>
+            </a:r>
+            <a:endParaRPr lang="en-US" sz="1300" dirty="0"/>
+          </a:p>
+        </p:txBody>
+      </p:sp>
+      <p:sp>
+        <p:nvSpPr>
+          <p:cNvPr id="9" name="Shape 7"/>
+          <p:cNvSpPr/>
+          <p:nvPr/>
+        </p:nvSpPr>
+        <p:spPr>
+          <a:xfrm>
+            <a:off x="548640" y="3337560"/>
+            <a:ext cx="457200" cy="457200"/>
+          </a:xfrm>
+          <a:prstGeom prst="ellipse">
+            <a:avLst/>
+          </a:prstGeom>
+          <a:solidFill>
+            <a:srgbClr val="1F4E78"/>
+          </a:solidFill>
+          <a:ln/>
+        </p:spPr>
+      </p:sp>
+      <p:sp>
+        <p:nvSpPr>
+          <p:cNvPr id="10" name="Text 8"/>
+          <p:cNvSpPr/>
+          <p:nvPr/>
+        </p:nvSpPr>
+        <p:spPr>
+          <a:xfrm>
+            <a:off x="548640" y="3337560"/>
+            <a:ext cx="457200" cy="457200"/>
+          </a:xfrm>
+          <a:prstGeom prst="rect">
+            <a:avLst/>
+          </a:prstGeom>
+          <a:noFill/>
+          <a:ln/>
+        </p:spPr>
+        <p:txBody>
+          <a:bodyPr wrap="square" lIns="0" tIns="0" rIns="0" bIns="0" rtlCol="0" anchor="ctr"/>
+          <a:lstStyle/>
+          <a:p>
+            <a:pPr algn="ctr" indent="0" marL="0">
+              <a:buNone/>
+            </a:pPr>
+            <a:r>
+              <a:rPr lang="en-US" sz="1600" b="1" dirty="0">
+                <a:solidFill>
+                  <a:srgbClr val="FFFFFF"/>
+                </a:solidFill>
+                <a:latin typeface="Calibri" pitchFamily="34" charset="0"/>
+                <a:ea typeface="Calibri" pitchFamily="34" charset="-122"/>
+                <a:cs typeface="Calibri" pitchFamily="34" charset="-120"/>
+              </a:rPr>
+              <a:t>3</a:t>
+            </a:r>
+            <a:endParaRPr lang="en-US" sz="1600" dirty="0"/>
+          </a:p>
+        </p:txBody>
+      </p:sp>
+      <p:sp>
+        <p:nvSpPr>
+          <p:cNvPr id="11" name="Text 9"/>
+          <p:cNvSpPr/>
+          <p:nvPr/>
+        </p:nvSpPr>
+        <p:spPr>
+          <a:xfrm>
+            <a:off x="1143000" y="3246120"/>
+            <a:ext cx="4709160" cy="777240"/>
+          </a:xfrm>
+          <a:prstGeom prst="rect">
+            <a:avLst/>
+          </a:prstGeom>
+          <a:noFill/>
+          <a:ln/>
+        </p:spPr>
+        <p:txBody>
+          <a:bodyPr wrap="square" lIns="0" tIns="0" rIns="0" bIns="0" rtlCol="0" anchor="ctr"/>
+          <a:lstStyle/>
+          <a:p>
+            <a:pPr indent="0" marL="0">
+              <a:buNone/>
+            </a:pPr>
+            <a:r>
+              <a:rPr lang="en-US" sz="1300" dirty="0">
+                <a:solidFill>
+                  <a:srgbClr val="1F1F1F"/>
+                </a:solidFill>
+                <a:latin typeface="Calibri" pitchFamily="34" charset="0"/>
+                <a:ea typeface="Calibri" pitchFamily="34" charset="-122"/>
+                <a:cs typeface="Calibri" pitchFamily="34" charset="-120"/>
+              </a:rPr>
+              <a:t>Clone YOUR fork — not the original</a:t>
+            </a:r>
+            <a:endParaRPr lang="en-US" sz="1300" dirty="0"/>
+          </a:p>
+        </p:txBody>
+      </p:sp>
+      <p:sp>
+        <p:nvSpPr>
+          <p:cNvPr id="12" name="Shape 10"/>
+          <p:cNvSpPr/>
+          <p:nvPr/>
+        </p:nvSpPr>
+        <p:spPr>
+          <a:xfrm>
+            <a:off x="548640" y="4206240"/>
+            <a:ext cx="457200" cy="457200"/>
+          </a:xfrm>
+          <a:prstGeom prst="ellipse">
+            <a:avLst/>
+          </a:prstGeom>
+          <a:solidFill>
+            <a:srgbClr val="1F4E78"/>
+          </a:solidFill>
+          <a:ln/>
+        </p:spPr>
+      </p:sp>
+      <p:sp>
+        <p:nvSpPr>
+          <p:cNvPr id="13" name="Text 11"/>
+          <p:cNvSpPr/>
+          <p:nvPr/>
+        </p:nvSpPr>
+        <p:spPr>
+          <a:xfrm>
+            <a:off x="548640" y="4206240"/>
+            <a:ext cx="457200" cy="457200"/>
+          </a:xfrm>
+          <a:prstGeom prst="rect">
+            <a:avLst/>
+          </a:prstGeom>
+          <a:noFill/>
+          <a:ln/>
+        </p:spPr>
+        <p:txBody>
+          <a:bodyPr wrap="square" lIns="0" tIns="0" rIns="0" bIns="0" rtlCol="0" anchor="ctr"/>
+          <a:lstStyle/>
+          <a:p>
+            <a:pPr algn="ctr" indent="0" marL="0">
+              <a:buNone/>
+            </a:pPr>
+            <a:r>
+              <a:rPr lang="en-US" sz="1600" b="1" dirty="0">
+                <a:solidFill>
+                  <a:srgbClr val="FFFFFF"/>
+                </a:solidFill>
+                <a:latin typeface="Calibri" pitchFamily="34" charset="0"/>
+                <a:ea typeface="Calibri" pitchFamily="34" charset="-122"/>
+                <a:cs typeface="Calibri" pitchFamily="34" charset="-120"/>
+              </a:rPr>
+              <a:t>4</a:t>
+            </a:r>
+            <a:endParaRPr lang="en-US" sz="1600" dirty="0"/>
+          </a:p>
+        </p:txBody>
+      </p:sp>
+      <p:sp>
+        <p:nvSpPr>
+          <p:cNvPr id="14" name="Text 12"/>
+          <p:cNvSpPr/>
+          <p:nvPr/>
+        </p:nvSpPr>
+        <p:spPr>
+          <a:xfrm>
+            <a:off x="1143000" y="4114800"/>
+            <a:ext cx="4709160" cy="777240"/>
+          </a:xfrm>
+          <a:prstGeom prst="rect">
+            <a:avLst/>
+          </a:prstGeom>
+          <a:noFill/>
+          <a:ln/>
+        </p:spPr>
+        <p:txBody>
+          <a:bodyPr wrap="square" lIns="0" tIns="0" rIns="0" bIns="0" rtlCol="0" anchor="ctr"/>
+          <a:lstStyle/>
+          <a:p>
+            <a:pPr indent="0" marL="0">
+              <a:buNone/>
+            </a:pPr>
+            <a:r>
+              <a:rPr lang="en-US" sz="1300" dirty="0">
+                <a:solidFill>
+                  <a:srgbClr val="1F1F1F"/>
+                </a:solidFill>
+                <a:latin typeface="Calibri" pitchFamily="34" charset="0"/>
+                <a:ea typeface="Calibri" pitchFamily="34" charset="-122"/>
+                <a:cs typeface="Calibri" pitchFamily="34" charset="-120"/>
+              </a:rPr>
+              <a:t>Open your AI assistant (Workbuddy / Claude Code / Codex) in the cloned folder</a:t>
+            </a:r>
+            <a:endParaRPr lang="en-US" sz="1300" dirty="0"/>
+          </a:p>
+        </p:txBody>
+      </p:sp>
+      <p:sp>
+        <p:nvSpPr>
+          <p:cNvPr id="15" name="Shape 13"/>
+          <p:cNvSpPr/>
+          <p:nvPr/>
+        </p:nvSpPr>
+        <p:spPr>
+          <a:xfrm>
+            <a:off x="6309360" y="1600200"/>
+            <a:ext cx="457200" cy="457200"/>
+          </a:xfrm>
+          <a:prstGeom prst="ellipse">
+            <a:avLst/>
+          </a:prstGeom>
+          <a:solidFill>
+            <a:srgbClr val="1F4E78"/>
+          </a:solidFill>
+          <a:ln/>
+        </p:spPr>
+      </p:sp>
+      <p:sp>
+        <p:nvSpPr>
+          <p:cNvPr id="16" name="Text 14"/>
+          <p:cNvSpPr/>
+          <p:nvPr/>
+        </p:nvSpPr>
+        <p:spPr>
+          <a:xfrm>
+            <a:off x="6309360" y="1600200"/>
+            <a:ext cx="457200" cy="457200"/>
+          </a:xfrm>
+          <a:prstGeom prst="rect">
+            <a:avLst/>
+          </a:prstGeom>
+          <a:noFill/>
+          <a:ln/>
+        </p:spPr>
+        <p:txBody>
+          <a:bodyPr wrap="square" lIns="0" tIns="0" rIns="0" bIns="0" rtlCol="0" anchor="ctr"/>
+          <a:lstStyle/>
+          <a:p>
+            <a:pPr algn="ctr" indent="0" marL="0">
+              <a:buNone/>
+            </a:pPr>
+            <a:r>
+              <a:rPr lang="en-US" sz="1600" b="1" dirty="0">
+                <a:solidFill>
+                  <a:srgbClr val="FFFFFF"/>
+                </a:solidFill>
+                <a:latin typeface="Calibri" pitchFamily="34" charset="0"/>
+                <a:ea typeface="Calibri" pitchFamily="34" charset="-122"/>
+                <a:cs typeface="Calibri" pitchFamily="34" charset="-120"/>
+              </a:rPr>
+              <a:t>5</a:t>
+            </a:r>
+            <a:endParaRPr lang="en-US" sz="1600" dirty="0"/>
+          </a:p>
+        </p:txBody>
+      </p:sp>
+      <p:sp>
+        <p:nvSpPr>
+          <p:cNvPr id="17" name="Text 15"/>
+          <p:cNvSpPr/>
+          <p:nvPr/>
+        </p:nvSpPr>
+        <p:spPr>
+          <a:xfrm>
+            <a:off x="6903720" y="1508760"/>
+            <a:ext cx="4709160" cy="777240"/>
+          </a:xfrm>
+          <a:prstGeom prst="rect">
+            <a:avLst/>
+          </a:prstGeom>
+          <a:noFill/>
+          <a:ln/>
+        </p:spPr>
+        <p:txBody>
+          <a:bodyPr wrap="square" lIns="0" tIns="0" rIns="0" bIns="0" rtlCol="0" anchor="ctr"/>
+          <a:lstStyle/>
+          <a:p>
+            <a:pPr indent="0" marL="0">
+              <a:buNone/>
+            </a:pPr>
+            <a:r>
+              <a:rPr lang="en-US" sz="1300" dirty="0">
+                <a:solidFill>
+                  <a:srgbClr val="1F1F1F"/>
+                </a:solidFill>
+                <a:latin typeface="Calibri" pitchFamily="34" charset="0"/>
+                <a:ea typeface="Calibri" pitchFamily="34" charset="-122"/>
+                <a:cs typeface="Calibri" pitchFamily="34" charset="-120"/>
+              </a:rPr>
+              <a:t>Ask it: "Examine this repo and help me run the 5 reviews myself"</a:t>
+            </a:r>
+            <a:endParaRPr lang="en-US" sz="1300" dirty="0"/>
+          </a:p>
+        </p:txBody>
+      </p:sp>
+      <p:sp>
+        <p:nvSpPr>
+          <p:cNvPr id="18" name="Shape 16"/>
+          <p:cNvSpPr/>
+          <p:nvPr/>
+        </p:nvSpPr>
+        <p:spPr>
+          <a:xfrm>
+            <a:off x="6309360" y="2468880"/>
+            <a:ext cx="457200" cy="457200"/>
+          </a:xfrm>
+          <a:prstGeom prst="ellipse">
+            <a:avLst/>
+          </a:prstGeom>
+          <a:solidFill>
+            <a:srgbClr val="1F4E78"/>
+          </a:solidFill>
+          <a:ln/>
+        </p:spPr>
+      </p:sp>
+      <p:sp>
+        <p:nvSpPr>
+          <p:cNvPr id="19" name="Text 17"/>
+          <p:cNvSpPr/>
+          <p:nvPr/>
+        </p:nvSpPr>
+        <p:spPr>
+          <a:xfrm>
+            <a:off x="6309360" y="2468880"/>
+            <a:ext cx="457200" cy="457200"/>
+          </a:xfrm>
+          <a:prstGeom prst="rect">
+            <a:avLst/>
+          </a:prstGeom>
+          <a:noFill/>
+          <a:ln/>
+        </p:spPr>
+        <p:txBody>
+          <a:bodyPr wrap="square" lIns="0" tIns="0" rIns="0" bIns="0" rtlCol="0" anchor="ctr"/>
+          <a:lstStyle/>
+          <a:p>
+            <a:pPr algn="ctr" indent="0" marL="0">
+              <a:buNone/>
+            </a:pPr>
+            <a:r>
+              <a:rPr lang="en-US" sz="1600" b="1" dirty="0">
+                <a:solidFill>
+                  <a:srgbClr val="FFFFFF"/>
+                </a:solidFill>
+                <a:latin typeface="Calibri" pitchFamily="34" charset="0"/>
+                <a:ea typeface="Calibri" pitchFamily="34" charset="-122"/>
+                <a:cs typeface="Calibri" pitchFamily="34" charset="-120"/>
+              </a:rPr>
+              <a:t>6</a:t>
+            </a:r>
+            <a:endParaRPr lang="en-US" sz="1600" dirty="0"/>
+          </a:p>
+        </p:txBody>
+      </p:sp>
+      <p:sp>
+        <p:nvSpPr>
+          <p:cNvPr id="20" name="Text 18"/>
+          <p:cNvSpPr/>
+          <p:nvPr/>
+        </p:nvSpPr>
+        <p:spPr>
+          <a:xfrm>
+            <a:off x="6903720" y="2377440"/>
+            <a:ext cx="4709160" cy="777240"/>
+          </a:xfrm>
+          <a:prstGeom prst="rect">
+            <a:avLst/>
+          </a:prstGeom>
+          <a:noFill/>
+          <a:ln/>
+        </p:spPr>
+        <p:txBody>
+          <a:bodyPr wrap="square" lIns="0" tIns="0" rIns="0" bIns="0" rtlCol="0" anchor="ctr"/>
+          <a:lstStyle/>
+          <a:p>
+            <a:pPr indent="0" marL="0">
+              <a:buNone/>
+            </a:pPr>
+            <a:r>
+              <a:rPr lang="en-US" sz="1300" dirty="0">
+                <a:solidFill>
+                  <a:srgbClr val="1F1F1F"/>
+                </a:solidFill>
+                <a:latin typeface="Calibri" pitchFamily="34" charset="0"/>
+                <a:ea typeface="Calibri" pitchFamily="34" charset="-122"/>
+                <a:cs typeface="Calibri" pitchFamily="34" charset="-120"/>
+              </a:rPr>
+              <a:t>Practice the full workflow — install, 5 reviews, implement, commit</a:t>
+            </a:r>
+            <a:endParaRPr lang="en-US" sz="1300" dirty="0"/>
+          </a:p>
+        </p:txBody>
+      </p:sp>
+      <p:sp>
+        <p:nvSpPr>
+          <p:cNvPr id="21" name="Shape 19"/>
+          <p:cNvSpPr/>
+          <p:nvPr/>
+        </p:nvSpPr>
+        <p:spPr>
+          <a:xfrm>
+            <a:off x="6309360" y="3337560"/>
+            <a:ext cx="457200" cy="457200"/>
+          </a:xfrm>
+          <a:prstGeom prst="ellipse">
+            <a:avLst/>
+          </a:prstGeom>
+          <a:solidFill>
+            <a:srgbClr val="1F4E78"/>
+          </a:solidFill>
+          <a:ln/>
+        </p:spPr>
+      </p:sp>
+      <p:sp>
+        <p:nvSpPr>
+          <p:cNvPr id="22" name="Text 20"/>
+          <p:cNvSpPr/>
+          <p:nvPr/>
+        </p:nvSpPr>
+        <p:spPr>
+          <a:xfrm>
+            <a:off x="6309360" y="3337560"/>
+            <a:ext cx="457200" cy="457200"/>
+          </a:xfrm>
+          <a:prstGeom prst="rect">
+            <a:avLst/>
+          </a:prstGeom>
+          <a:noFill/>
+          <a:ln/>
+        </p:spPr>
+        <p:txBody>
+          <a:bodyPr wrap="square" lIns="0" tIns="0" rIns="0" bIns="0" rtlCol="0" anchor="ctr"/>
+          <a:lstStyle/>
+          <a:p>
+            <a:pPr algn="ctr" indent="0" marL="0">
+              <a:buNone/>
+            </a:pPr>
+            <a:r>
+              <a:rPr lang="en-US" sz="1600" b="1" dirty="0">
+                <a:solidFill>
+                  <a:srgbClr val="FFFFFF"/>
+                </a:solidFill>
+                <a:latin typeface="Calibri" pitchFamily="34" charset="0"/>
+                <a:ea typeface="Calibri" pitchFamily="34" charset="-122"/>
+                <a:cs typeface="Calibri" pitchFamily="34" charset="-120"/>
+              </a:rPr>
+              <a:t>7</a:t>
+            </a:r>
+            <a:endParaRPr lang="en-US" sz="1600" dirty="0"/>
+          </a:p>
+        </p:txBody>
+      </p:sp>
+      <p:sp>
+        <p:nvSpPr>
+          <p:cNvPr id="23" name="Text 21"/>
+          <p:cNvSpPr/>
+          <p:nvPr/>
+        </p:nvSpPr>
+        <p:spPr>
+          <a:xfrm>
+            <a:off x="6903720" y="3246120"/>
+            <a:ext cx="4709160" cy="777240"/>
+          </a:xfrm>
+          <a:prstGeom prst="rect">
+            <a:avLst/>
+          </a:prstGeom>
+          <a:noFill/>
+          <a:ln/>
+        </p:spPr>
+        <p:txBody>
+          <a:bodyPr wrap="square" lIns="0" tIns="0" rIns="0" bIns="0" rtlCol="0" anchor="ctr"/>
+          <a:lstStyle/>
+          <a:p>
+            <a:pPr indent="0" marL="0">
+              <a:buNone/>
+            </a:pPr>
+            <a:r>
+              <a:rPr lang="en-US" sz="1300" dirty="0">
+                <a:solidFill>
+                  <a:srgbClr val="1F1F1F"/>
+                </a:solidFill>
+                <a:latin typeface="Calibri" pitchFamily="34" charset="0"/>
+                <a:ea typeface="Calibri" pitchFamily="34" charset="-122"/>
+                <a:cs typeface="Calibri" pitchFamily="34" charset="-120"/>
+              </a:rPr>
+              <a:t>Optional: link "upstream" to pull future updates from the original</a:t>
+            </a:r>
+            <a:endParaRPr lang="en-US" sz="1300" dirty="0"/>
+          </a:p>
+        </p:txBody>
+      </p:sp>
+    </p:spTree>
+  </p:cSld>
+  <p:clrMapOvr>
+    <a:masterClrMapping/>
+  </p:clrMapOvr>
+</p:sld>
+</file>
+
+<file path=ppt/slides/slide11.xml><?xml version="1.0" encoding="utf-8"?>
+<p:sld xmlns:a="http://schemas.openxmlformats.org/drawingml/2006/main" xmlns:r="http://schemas.openxmlformats.org/officeDocument/2006/relationships" xmlns:p="http://schemas.openxmlformats.org/presentationml/2006/main">
+  <p:cSld name="Slide 11">
+    <p:bg>
+      <p:bgPr>
+        <a:solidFill>
+          <a:srgbClr val="FFFFFF"/>
+        </a:solidFill>
+      </p:bgPr>
+    </p:bg>
+    <p:spTree>
+      <p:nvGrpSpPr>
+        <p:cNvPr id="1" name=""/>
+        <p:cNvGrpSpPr/>
+        <p:nvPr/>
+      </p:nvGrpSpPr>
+      <p:grpSpPr>
+        <a:xfrm>
+          <a:off x="0" y="0"/>
+          <a:ext cx="0" cy="0"/>
+          <a:chOff x="0" y="0"/>
+          <a:chExt cx="0" cy="0"/>
+        </a:xfrm>
+      </p:grpSpPr>
+      <p:sp>
+        <p:nvSpPr>
+          <p:cNvPr id="2" name="Text 0"/>
+          <p:cNvSpPr/>
+          <p:nvPr/>
+        </p:nvSpPr>
+        <p:spPr>
+          <a:xfrm>
+            <a:off x="548640" y="457200"/>
+            <a:ext cx="11064240" cy="822960"/>
+          </a:xfrm>
+          <a:prstGeom prst="rect">
+            <a:avLst/>
+          </a:prstGeom>
+          <a:noFill/>
+          <a:ln/>
+        </p:spPr>
+        <p:txBody>
+          <a:bodyPr wrap="square" lIns="0" tIns="0" rIns="0" bIns="0" rtlCol="0" anchor="ctr"/>
+          <a:lstStyle/>
+          <a:p>
+            <a:pPr indent="0" marL="0">
+              <a:buNone/>
+            </a:pPr>
+            <a:r>
+              <a:rPr lang="en-US" sz="2600" b="1" dirty="0">
+                <a:solidFill>
+                  <a:srgbClr val="1F4E78"/>
+                </a:solidFill>
+                <a:latin typeface="Cambria" pitchFamily="34" charset="0"/>
+                <a:ea typeface="Cambria" pitchFamily="34" charset="-122"/>
+                <a:cs typeface="Cambria" pitchFamily="34" charset="-120"/>
+              </a:rPr>
+              <a:t>Stuck, or just checking in? File a weekly report</a:t>
+            </a:r>
+            <a:endParaRPr lang="en-US" sz="2600" dirty="0"/>
+          </a:p>
+        </p:txBody>
+      </p:sp>
+      <p:pic>
+        <p:nvPicPr>
+          <p:cNvPr id="3" name="Image 0" descr="preencoded.png">    </p:cNvPr>
+          <p:cNvPicPr>
+            <a:picLocks noChangeAspect="1"/>
+          </p:cNvPicPr>
+          <p:nvPr/>
+        </p:nvPicPr>
+        <p:blipFill>
+          <a:blip r:embed="rId1"/>
+          <a:stretch>
+            <a:fillRect/>
+          </a:stretch>
+        </p:blipFill>
+        <p:spPr>
+          <a:xfrm>
+            <a:off x="640080" y="1463040"/>
+            <a:ext cx="502920" cy="502920"/>
+          </a:xfrm>
+          <a:prstGeom prst="rect">
+            <a:avLst/>
+          </a:prstGeom>
+        </p:spPr>
+      </p:pic>
+      <p:sp>
+        <p:nvSpPr>
+          <p:cNvPr id="4" name="Text 1"/>
+          <p:cNvSpPr/>
+          <p:nvPr/>
+        </p:nvSpPr>
+        <p:spPr>
+          <a:xfrm>
+            <a:off x="1280160" y="1463040"/>
+            <a:ext cx="10058400" cy="502920"/>
+          </a:xfrm>
+          <a:prstGeom prst="rect">
+            <a:avLst/>
+          </a:prstGeom>
+          <a:noFill/>
+          <a:ln/>
+        </p:spPr>
+        <p:txBody>
+          <a:bodyPr wrap="square" lIns="0" tIns="0" rIns="0" bIns="0" rtlCol="0" anchor="ctr"/>
+          <a:lstStyle/>
+          <a:p>
+            <a:pPr indent="0" marL="0">
+              <a:buNone/>
+            </a:pPr>
+            <a:r>
+              <a:rPr lang="en-US" sz="1500" b="1" dirty="0">
+                <a:solidFill>
+                  <a:srgbClr val="1F4E78"/>
+                </a:solidFill>
+                <a:latin typeface="Calibri" pitchFamily="34" charset="0"/>
+                <a:ea typeface="Calibri" pitchFamily="34" charset="-122"/>
+                <a:cs typeface="Calibri" pitchFamily="34" charset="-120"/>
+              </a:rPr>
+              <a:t>Where:  </a:t>
+            </a:r>
+            <a:pPr indent="0" marL="0">
+              <a:buNone/>
+            </a:pPr>
+            <a:r>
+              <a:rPr lang="en-US" sz="1500" dirty="0">
+                <a:solidFill>
+                  <a:srgbClr val="1F1F1F"/>
+                </a:solidFill>
+                <a:latin typeface="Calibri" pitchFamily="34" charset="0"/>
+                <a:ea typeface="Calibri" pitchFamily="34" charset="-122"/>
+                <a:cs typeface="Calibri" pitchFamily="34" charset="-120"/>
+              </a:rPr>
+              <a:t>github.com/mikelix/gstack-tutorial-1/issues → New Issue → "Weekly Progress Report" template</a:t>
+            </a:r>
+            <a:endParaRPr lang="en-US" sz="1500" dirty="0"/>
+          </a:p>
+        </p:txBody>
+      </p:sp>
+      <p:sp>
+        <p:nvSpPr>
+          <p:cNvPr id="5" name="Text 2"/>
+          <p:cNvSpPr/>
+          <p:nvPr/>
+        </p:nvSpPr>
+        <p:spPr>
+          <a:xfrm>
+            <a:off x="1280160" y="2011680"/>
+            <a:ext cx="10058400" cy="457200"/>
+          </a:xfrm>
+          <a:prstGeom prst="rect">
+            <a:avLst/>
+          </a:prstGeom>
+          <a:noFill/>
+          <a:ln/>
+        </p:spPr>
+        <p:txBody>
+          <a:bodyPr wrap="square" lIns="0" tIns="0" rIns="0" bIns="0" rtlCol="0" anchor="ctr"/>
+          <a:lstStyle/>
+          <a:p>
+            <a:pPr indent="0" marL="0">
+              <a:buNone/>
+            </a:pPr>
+            <a:r>
+              <a:rPr lang="en-US" sz="1500" b="1" dirty="0">
+                <a:solidFill>
+                  <a:srgbClr val="1F4E78"/>
+                </a:solidFill>
+                <a:latin typeface="Calibri" pitchFamily="34" charset="0"/>
+                <a:ea typeface="Calibri" pitchFamily="34" charset="-122"/>
+                <a:cs typeface="Calibri" pitchFamily="34" charset="-120"/>
+              </a:rPr>
+              <a:t>Note:  </a:t>
+            </a:r>
+            <a:pPr indent="0" marL="0">
+              <a:buNone/>
+            </a:pPr>
+            <a:r>
+              <a:rPr lang="en-US" sz="1500" i="1" dirty="0">
+                <a:solidFill>
+                  <a:srgbClr val="1F1F1F"/>
+                </a:solidFill>
+                <a:latin typeface="Calibri" pitchFamily="34" charset="0"/>
+                <a:ea typeface="Calibri" pitchFamily="34" charset="-122"/>
+                <a:cs typeface="Calibri" pitchFamily="34" charset="-120"/>
+              </a:rPr>
+              <a:t>post to the ORIGINAL repo's issues, not your own fork's — that's where the instructor looks</a:t>
+            </a:r>
+            <a:endParaRPr lang="en-US" sz="1500" dirty="0"/>
+          </a:p>
+        </p:txBody>
+      </p:sp>
+      <p:sp>
+        <p:nvSpPr>
+          <p:cNvPr id="6" name="Text 3"/>
+          <p:cNvSpPr/>
+          <p:nvPr/>
+        </p:nvSpPr>
+        <p:spPr>
+          <a:xfrm>
+            <a:off x="640080" y="2697480"/>
+            <a:ext cx="10698480" cy="457200"/>
+          </a:xfrm>
+          <a:prstGeom prst="rect">
+            <a:avLst/>
+          </a:prstGeom>
+          <a:noFill/>
+          <a:ln/>
+        </p:spPr>
+        <p:txBody>
+          <a:bodyPr wrap="square" lIns="0" tIns="0" rIns="0" bIns="0" rtlCol="0" anchor="ctr"/>
+          <a:lstStyle/>
+          <a:p>
+            <a:pPr indent="0" marL="0">
+              <a:buNone/>
+            </a:pPr>
+            <a:r>
+              <a:rPr lang="en-US" sz="1600" b="1" dirty="0">
+                <a:solidFill>
+                  <a:srgbClr val="1F4E78"/>
+                </a:solidFill>
+                <a:latin typeface="Calibri" pitchFamily="34" charset="0"/>
+                <a:ea typeface="Calibri" pitchFamily="34" charset="-122"/>
+                <a:cs typeface="Calibri" pitchFamily="34" charset="-120"/>
+              </a:rPr>
+              <a:t>Three fields are required at the top of every report:</a:t>
+            </a:r>
+            <a:endParaRPr lang="en-US" sz="1600" dirty="0"/>
+          </a:p>
+        </p:txBody>
+      </p:sp>
+      <p:sp>
+        <p:nvSpPr>
+          <p:cNvPr id="7" name="Shape 4"/>
+          <p:cNvSpPr/>
+          <p:nvPr/>
+        </p:nvSpPr>
+        <p:spPr>
+          <a:xfrm>
+            <a:off x="640080" y="3291840"/>
+            <a:ext cx="3520440" cy="1554480"/>
+          </a:xfrm>
+          <a:prstGeom prst="roundRect">
+            <a:avLst>
+              <a:gd name="adj" fmla="val 4706"/>
+            </a:avLst>
+          </a:prstGeom>
+          <a:solidFill>
+            <a:srgbClr val="F2F2F2"/>
+          </a:solidFill>
+          <a:ln/>
+          <a:effectLst>
+            <a:outerShdw sx="100000" sy="100000" kx="0" ky="0" algn="bl" rotWithShape="0" blurRad="63500" dist="25400" dir="5400000">
+              <a:srgbClr val="808080">
+                <a:alpha val="20000"/>
+              </a:srgbClr>
+            </a:outerShdw>
+          </a:effectLst>
+        </p:spPr>
+      </p:sp>
+      <p:pic>
+        <p:nvPicPr>
+          <p:cNvPr id="8" name="Image 1" descr="preencoded.png">    </p:cNvPr>
+          <p:cNvPicPr>
+            <a:picLocks noChangeAspect="1"/>
+          </p:cNvPicPr>
+          <p:nvPr/>
+        </p:nvPicPr>
+        <p:blipFill>
+          <a:blip r:embed="rId2"/>
+          <a:stretch>
+            <a:fillRect/>
+          </a:stretch>
+        </p:blipFill>
+        <p:spPr>
+          <a:xfrm>
+            <a:off x="868680" y="3520440"/>
+            <a:ext cx="320040" cy="320040"/>
+          </a:xfrm>
+          <a:prstGeom prst="rect">
+            <a:avLst/>
+          </a:prstGeom>
+        </p:spPr>
+      </p:pic>
+      <p:sp>
+        <p:nvSpPr>
+          <p:cNvPr id="9" name="Text 5"/>
+          <p:cNvSpPr/>
+          <p:nvPr/>
+        </p:nvSpPr>
+        <p:spPr>
+          <a:xfrm>
+            <a:off x="1280160" y="3474720"/>
+            <a:ext cx="2697480" cy="411480"/>
+          </a:xfrm>
+          <a:prstGeom prst="rect">
+            <a:avLst/>
+          </a:prstGeom>
+          <a:noFill/>
+          <a:ln/>
+        </p:spPr>
+        <p:txBody>
+          <a:bodyPr wrap="square" lIns="0" tIns="0" rIns="0" bIns="0" rtlCol="0" anchor="ctr"/>
+          <a:lstStyle/>
+          <a:p>
+            <a:pPr indent="0" marL="0">
+              <a:buNone/>
+            </a:pPr>
+            <a:r>
+              <a:rPr lang="en-US" sz="1400" b="1" dirty="0">
+                <a:solidFill>
+                  <a:srgbClr val="1F4E78"/>
+                </a:solidFill>
+                <a:latin typeface="Calibri" pitchFamily="34" charset="0"/>
+                <a:ea typeface="Calibri" pitchFamily="34" charset="-122"/>
+                <a:cs typeface="Calibri" pitchFamily="34" charset="-120"/>
+              </a:rPr>
+              <a:t>User's Name</a:t>
+            </a:r>
+            <a:endParaRPr lang="en-US" sz="1400" dirty="0"/>
+          </a:p>
+        </p:txBody>
+      </p:sp>
+      <p:sp>
+        <p:nvSpPr>
+          <p:cNvPr id="10" name="Text 6"/>
+          <p:cNvSpPr/>
+          <p:nvPr/>
+        </p:nvSpPr>
+        <p:spPr>
+          <a:xfrm>
+            <a:off x="868680" y="3977640"/>
+            <a:ext cx="3063240" cy="731520"/>
+          </a:xfrm>
+          <a:prstGeom prst="rect">
+            <a:avLst/>
+          </a:prstGeom>
+          <a:noFill/>
+          <a:ln/>
+        </p:spPr>
+        <p:txBody>
+          <a:bodyPr wrap="square" lIns="0" tIns="0" rIns="0" bIns="0" rtlCol="0" anchor="t"/>
+          <a:lstStyle/>
+          <a:p>
+            <a:pPr indent="0" marL="0">
+              <a:buNone/>
+            </a:pPr>
+            <a:r>
+              <a:rPr lang="en-US" sz="1200" dirty="0">
+                <a:solidFill>
+                  <a:srgbClr val="1F1F1F"/>
+                </a:solidFill>
+                <a:latin typeface="Calibri" pitchFamily="34" charset="0"/>
+                <a:ea typeface="Calibri" pitchFamily="34" charset="-122"/>
+                <a:cs typeface="Calibri" pitchFamily="34" charset="-120"/>
+              </a:rPr>
+              <a:t>Your full name</a:t>
+            </a:r>
+            <a:endParaRPr lang="en-US" sz="1200" dirty="0"/>
+          </a:p>
+        </p:txBody>
+      </p:sp>
+      <p:sp>
+        <p:nvSpPr>
+          <p:cNvPr id="11" name="Shape 7"/>
+          <p:cNvSpPr/>
+          <p:nvPr/>
+        </p:nvSpPr>
+        <p:spPr>
+          <a:xfrm>
+            <a:off x="4434840" y="3291840"/>
+            <a:ext cx="3520440" cy="1554480"/>
+          </a:xfrm>
+          <a:prstGeom prst="roundRect">
+            <a:avLst>
+              <a:gd name="adj" fmla="val 4706"/>
+            </a:avLst>
+          </a:prstGeom>
+          <a:solidFill>
+            <a:srgbClr val="F2F2F2"/>
+          </a:solidFill>
+          <a:ln/>
+          <a:effectLst>
+            <a:outerShdw sx="100000" sy="100000" kx="0" ky="0" algn="bl" rotWithShape="0" blurRad="63500" dist="25400" dir="5400000">
+              <a:srgbClr val="808080">
+                <a:alpha val="20000"/>
+              </a:srgbClr>
+            </a:outerShdw>
+          </a:effectLst>
+        </p:spPr>
+      </p:sp>
+      <p:pic>
+        <p:nvPicPr>
+          <p:cNvPr id="12" name="Image 2" descr="preencoded.png">    </p:cNvPr>
+          <p:cNvPicPr>
+            <a:picLocks noChangeAspect="1"/>
+          </p:cNvPicPr>
+          <p:nvPr/>
+        </p:nvPicPr>
+        <p:blipFill>
+          <a:blip r:embed="rId3"/>
+          <a:stretch>
+            <a:fillRect/>
+          </a:stretch>
+        </p:blipFill>
+        <p:spPr>
+          <a:xfrm>
+            <a:off x="4663440" y="3520440"/>
+            <a:ext cx="320040" cy="320040"/>
+          </a:xfrm>
+          <a:prstGeom prst="rect">
+            <a:avLst/>
+          </a:prstGeom>
+        </p:spPr>
+      </p:pic>
+      <p:sp>
+        <p:nvSpPr>
+          <p:cNvPr id="13" name="Text 8"/>
+          <p:cNvSpPr/>
+          <p:nvPr/>
+        </p:nvSpPr>
+        <p:spPr>
+          <a:xfrm>
+            <a:off x="5074920" y="3474720"/>
+            <a:ext cx="2697480" cy="411480"/>
+          </a:xfrm>
+          <a:prstGeom prst="rect">
+            <a:avLst/>
+          </a:prstGeom>
+          <a:noFill/>
+          <a:ln/>
+        </p:spPr>
+        <p:txBody>
+          <a:bodyPr wrap="square" lIns="0" tIns="0" rIns="0" bIns="0" rtlCol="0" anchor="ctr"/>
+          <a:lstStyle/>
+          <a:p>
+            <a:pPr indent="0" marL="0">
+              <a:buNone/>
+            </a:pPr>
+            <a:r>
+              <a:rPr lang="en-US" sz="1400" b="1" dirty="0">
+                <a:solidFill>
+                  <a:srgbClr val="1F4E78"/>
+                </a:solidFill>
+                <a:latin typeface="Calibri" pitchFamily="34" charset="0"/>
+                <a:ea typeface="Calibri" pitchFamily="34" charset="-122"/>
+                <a:cs typeface="Calibri" pitchFamily="34" charset="-120"/>
+              </a:rPr>
+              <a:t>Project</a:t>
+            </a:r>
+            <a:endParaRPr lang="en-US" sz="1400" dirty="0"/>
+          </a:p>
+        </p:txBody>
+      </p:sp>
+      <p:sp>
+        <p:nvSpPr>
+          <p:cNvPr id="14" name="Text 9"/>
+          <p:cNvSpPr/>
+          <p:nvPr/>
+        </p:nvSpPr>
+        <p:spPr>
+          <a:xfrm>
+            <a:off x="4663440" y="3977640"/>
+            <a:ext cx="3063240" cy="731520"/>
+          </a:xfrm>
+          <a:prstGeom prst="rect">
+            <a:avLst/>
+          </a:prstGeom>
+          <a:noFill/>
+          <a:ln/>
+        </p:spPr>
+        <p:txBody>
+          <a:bodyPr wrap="square" lIns="0" tIns="0" rIns="0" bIns="0" rtlCol="0" anchor="t"/>
+          <a:lstStyle/>
+          <a:p>
+            <a:pPr indent="0" marL="0">
+              <a:buNone/>
+            </a:pPr>
+            <a:r>
+              <a:rPr lang="en-US" sz="1200" dirty="0">
+                <a:solidFill>
+                  <a:srgbClr val="1F1F1F"/>
+                </a:solidFill>
+                <a:latin typeface="Calibri" pitchFamily="34" charset="0"/>
+                <a:ea typeface="Calibri" pitchFamily="34" charset="-122"/>
+                <a:cs typeface="Calibri" pitchFamily="34" charset="-120"/>
+              </a:rPr>
+              <a:t>Gstack Tutorial #1</a:t>
+            </a:r>
+            <a:endParaRPr lang="en-US" sz="1200" dirty="0"/>
+          </a:p>
+        </p:txBody>
+      </p:sp>
+      <p:sp>
+        <p:nvSpPr>
+          <p:cNvPr id="15" name="Shape 10"/>
+          <p:cNvSpPr/>
+          <p:nvPr/>
+        </p:nvSpPr>
+        <p:spPr>
+          <a:xfrm>
+            <a:off x="8229600" y="3291840"/>
+            <a:ext cx="3520440" cy="1554480"/>
+          </a:xfrm>
+          <a:prstGeom prst="roundRect">
+            <a:avLst>
+              <a:gd name="adj" fmla="val 4706"/>
+            </a:avLst>
+          </a:prstGeom>
+          <a:solidFill>
+            <a:srgbClr val="F2F2F2"/>
+          </a:solidFill>
+          <a:ln/>
+          <a:effectLst>
+            <a:outerShdw sx="100000" sy="100000" kx="0" ky="0" algn="bl" rotWithShape="0" blurRad="63500" dist="25400" dir="5400000">
+              <a:srgbClr val="808080">
+                <a:alpha val="20000"/>
+              </a:srgbClr>
+            </a:outerShdw>
+          </a:effectLst>
+        </p:spPr>
+      </p:sp>
+      <p:pic>
+        <p:nvPicPr>
+          <p:cNvPr id="16" name="Image 3" descr="preencoded.png">    </p:cNvPr>
+          <p:cNvPicPr>
+            <a:picLocks noChangeAspect="1"/>
+          </p:cNvPicPr>
+          <p:nvPr/>
+        </p:nvPicPr>
+        <p:blipFill>
+          <a:blip r:embed="rId4"/>
+          <a:stretch>
+            <a:fillRect/>
+          </a:stretch>
+        </p:blipFill>
+        <p:spPr>
+          <a:xfrm>
+            <a:off x="8458200" y="3520440"/>
+            <a:ext cx="320040" cy="320040"/>
+          </a:xfrm>
+          <a:prstGeom prst="rect">
+            <a:avLst/>
+          </a:prstGeom>
+        </p:spPr>
+      </p:pic>
+      <p:sp>
+        <p:nvSpPr>
+          <p:cNvPr id="17" name="Text 11"/>
+          <p:cNvSpPr/>
+          <p:nvPr/>
+        </p:nvSpPr>
+        <p:spPr>
+          <a:xfrm>
+            <a:off x="8869680" y="3474720"/>
+            <a:ext cx="2697480" cy="411480"/>
+          </a:xfrm>
+          <a:prstGeom prst="rect">
+            <a:avLst/>
+          </a:prstGeom>
+          <a:noFill/>
+          <a:ln/>
+        </p:spPr>
+        <p:txBody>
+          <a:bodyPr wrap="square" lIns="0" tIns="0" rIns="0" bIns="0" rtlCol="0" anchor="ctr"/>
+          <a:lstStyle/>
+          <a:p>
+            <a:pPr indent="0" marL="0">
+              <a:buNone/>
+            </a:pPr>
+            <a:r>
+              <a:rPr lang="en-US" sz="1400" b="1" dirty="0">
+                <a:solidFill>
+                  <a:srgbClr val="1F4E78"/>
+                </a:solidFill>
+                <a:latin typeface="Calibri" pitchFamily="34" charset="0"/>
+                <a:ea typeface="Calibri" pitchFamily="34" charset="-122"/>
+                <a:cs typeface="Calibri" pitchFamily="34" charset="-120"/>
+              </a:rPr>
+              <a:t>Submission Date</a:t>
+            </a:r>
+            <a:endParaRPr lang="en-US" sz="1400" dirty="0"/>
+          </a:p>
+        </p:txBody>
+      </p:sp>
+      <p:sp>
+        <p:nvSpPr>
+          <p:cNvPr id="18" name="Text 12"/>
+          <p:cNvSpPr/>
+          <p:nvPr/>
+        </p:nvSpPr>
+        <p:spPr>
+          <a:xfrm>
+            <a:off x="8458200" y="3977640"/>
+            <a:ext cx="3063240" cy="731520"/>
+          </a:xfrm>
+          <a:prstGeom prst="rect">
+            <a:avLst/>
+          </a:prstGeom>
+          <a:noFill/>
+          <a:ln/>
+        </p:spPr>
+        <p:txBody>
+          <a:bodyPr wrap="square" lIns="0" tIns="0" rIns="0" bIns="0" rtlCol="0" anchor="t"/>
+          <a:lstStyle/>
+          <a:p>
+            <a:pPr indent="0" marL="0">
+              <a:buNone/>
+            </a:pPr>
+            <a:r>
+              <a:rPr lang="en-US" sz="1200" dirty="0">
+                <a:solidFill>
+                  <a:srgbClr val="1F1F1F"/>
+                </a:solidFill>
+                <a:latin typeface="Calibri" pitchFamily="34" charset="0"/>
+                <a:ea typeface="Calibri" pitchFamily="34" charset="-122"/>
+                <a:cs typeface="Calibri" pitchFamily="34" charset="-120"/>
+              </a:rPr>
+              <a:t>day/month/year, e.g. 15/10/2026</a:t>
+            </a:r>
+            <a:endParaRPr lang="en-US" sz="1200" dirty="0"/>
+          </a:p>
+        </p:txBody>
+      </p:sp>
+      <p:sp>
+        <p:nvSpPr>
+          <p:cNvPr id="19" name="Text 13"/>
+          <p:cNvSpPr/>
+          <p:nvPr/>
+        </p:nvSpPr>
+        <p:spPr>
+          <a:xfrm>
+            <a:off x="640080" y="5074920"/>
+            <a:ext cx="10698480" cy="822960"/>
+          </a:xfrm>
+          <a:prstGeom prst="rect">
+            <a:avLst/>
+          </a:prstGeom>
+          <a:noFill/>
+          <a:ln/>
+        </p:spPr>
+        <p:txBody>
+          <a:bodyPr wrap="square" lIns="0" tIns="0" rIns="0" bIns="0" rtlCol="0" anchor="t"/>
+          <a:lstStyle/>
+          <a:p>
+            <a:pPr indent="0" marL="0">
+              <a:buNone/>
+            </a:pPr>
+            <a:r>
+              <a:rPr lang="en-US" sz="1200" i="1" dirty="0">
+                <a:solidFill>
+                  <a:srgbClr val="595959"/>
+                </a:solidFill>
+                <a:latin typeface="Calibri" pitchFamily="34" charset="0"/>
+                <a:ea typeface="Calibri" pitchFamily="34" charset="-122"/>
+                <a:cs typeface="Calibri" pitchFamily="34" charset="-120"/>
+              </a:rPr>
+              <a:t>Also include: your fork link, what you tried, the exact error message if any, and next week's plan. Full template: .github/ISSUE_TEMPLATE/weekly_progress_report.md</a:t>
+            </a:r>
+            <a:endParaRPr lang="en-US" sz="1200" dirty="0"/>
+          </a:p>
+        </p:txBody>
+      </p:sp>
+    </p:spTree>
+  </p:cSld>
+  <p:clrMapOvr>
+    <a:masterClrMapping/>
+  </p:clrMapOvr>
+</p:sld>
+</file>
+
+<file path=ppt/slides/slide12.xml><?xml version="1.0" encoding="utf-8"?>
+<p:sld xmlns:a="http://schemas.openxmlformats.org/drawingml/2006/main" xmlns:r="http://schemas.openxmlformats.org/officeDocument/2006/relationships" xmlns:p="http://schemas.openxmlformats.org/presentationml/2006/main">
+  <p:cSld name="Slide 12">
+    <p:bg>
+      <p:bgPr>
+        <a:solidFill>
           <a:srgbClr val="16374F"/>
         </a:solidFill>
       </p:bgPr>
